--- a/20261013_展示会LINE_前提予算の図解.pptx
+++ b/20261013_展示会LINE_前提予算の図解.pptx
@@ -3628,7 +3628,7 @@
                 <a:ea typeface="メイリオ"/>
                 <a:cs typeface="メイリオ"/>
               </a:rPr>
-              <a:t>広告費 月10万円 ＋ 運用手数料20%（2万円）＝ 月12万円</a:t>
+              <a:t>広告費 月30万円 ＋ 運用手数料20%（6万円）＝ 月36万円</a:t>
             </a:r>
           </a:p>
         </p:txBody>
@@ -4246,7 +4246,7 @@
                 <a:ea typeface="メイリオ"/>
                 <a:cs typeface="メイリオ"/>
               </a:rPr>
-              <a:t>店舗ごとに30万円を足すのではなく、全店舗で1つの枠（月12万円）</a:t>
+              <a:t>店舗ごとに30万円を足すのではなく、1店舗分（30万円）で全店舗のエリアに配信</a:t>
             </a:r>
           </a:p>
           <a:p>

--- a/20261013_展示会LINE_前提予算の図解.pptx
+++ b/20261013_展示会LINE_前提予算の図解.pptx
@@ -3628,7 +3628,7 @@
                 <a:ea typeface="メイリオ"/>
                 <a:cs typeface="メイリオ"/>
               </a:rPr>
-              <a:t>広告費 月30万円 ＋ 運用手数料20%（6万円）＝ 月36万円</a:t>
+              <a:t>通常20万円 ＋ CPF10万円 ＋ 運用手数料6万円 ＝ 月36万円</a:t>
             </a:r>
           </a:p>
         </p:txBody>
